--- a/0次案/卒研発表.pptx
+++ b/0次案/卒研発表.pptx
@@ -5,7 +5,7 @@
     <p:sldMasterId id="2147483648" r:id="rId1"/>
   </p:sldMasterIdLst>
   <p:notesMasterIdLst>
-    <p:notesMasterId r:id="rId11"/>
+    <p:notesMasterId r:id="rId12"/>
   </p:notesMasterIdLst>
   <p:sldIdLst>
     <p:sldId id="256" r:id="rId2"/>
@@ -17,6 +17,7 @@
     <p:sldId id="264" r:id="rId8"/>
     <p:sldId id="263" r:id="rId9"/>
     <p:sldId id="262" r:id="rId10"/>
+    <p:sldId id="268" r:id="rId11"/>
   </p:sldIdLst>
   <p:sldSz cx="12192000" cy="6858000"/>
   <p:notesSz cx="6858000" cy="9144000"/>
@@ -205,7 +206,7 @@
           <a:p>
             <a:fld id="{77AE3885-3256-4B9F-8882-5B1297EDF95C}" type="datetimeFigureOut">
               <a:rPr kumimoji="1" lang="ja-JP" altLang="en-US" smtClean="0"/>
-              <a:t>2026/8/6</a:t>
+              <a:t>2026/8/7</a:t>
             </a:fld>
             <a:endParaRPr kumimoji="1" lang="ja-JP" altLang="en-US"/>
           </a:p>
@@ -819,7 +820,7 @@
           <a:p>
             <a:fld id="{5E0EB2B4-2A3D-4984-9DB1-40EC1C35540F}" type="datetimeFigureOut">
               <a:rPr kumimoji="1" lang="ja-JP" altLang="en-US" smtClean="0"/>
-              <a:t>2026/8/6</a:t>
+              <a:t>2026/8/7</a:t>
             </a:fld>
             <a:endParaRPr kumimoji="1" lang="ja-JP" altLang="en-US"/>
           </a:p>
@@ -1049,7 +1050,7 @@
           <a:p>
             <a:fld id="{5E0EB2B4-2A3D-4984-9DB1-40EC1C35540F}" type="datetimeFigureOut">
               <a:rPr kumimoji="1" lang="ja-JP" altLang="en-US" smtClean="0"/>
-              <a:t>2026/8/6</a:t>
+              <a:t>2026/8/7</a:t>
             </a:fld>
             <a:endParaRPr kumimoji="1" lang="ja-JP" altLang="en-US"/>
           </a:p>
@@ -1289,7 +1290,7 @@
           <a:p>
             <a:fld id="{5E0EB2B4-2A3D-4984-9DB1-40EC1C35540F}" type="datetimeFigureOut">
               <a:rPr kumimoji="1" lang="ja-JP" altLang="en-US" smtClean="0"/>
-              <a:t>2026/8/6</a:t>
+              <a:t>2026/8/7</a:t>
             </a:fld>
             <a:endParaRPr kumimoji="1" lang="ja-JP" altLang="en-US"/>
           </a:p>
@@ -1519,7 +1520,7 @@
           <a:p>
             <a:fld id="{5E0EB2B4-2A3D-4984-9DB1-40EC1C35540F}" type="datetimeFigureOut">
               <a:rPr kumimoji="1" lang="ja-JP" altLang="en-US" smtClean="0"/>
-              <a:t>2026/8/6</a:t>
+              <a:t>2026/8/7</a:t>
             </a:fld>
             <a:endParaRPr kumimoji="1" lang="ja-JP" altLang="en-US"/>
           </a:p>
@@ -1794,7 +1795,7 @@
           <a:p>
             <a:fld id="{5E0EB2B4-2A3D-4984-9DB1-40EC1C35540F}" type="datetimeFigureOut">
               <a:rPr kumimoji="1" lang="ja-JP" altLang="en-US" smtClean="0"/>
-              <a:t>2026/8/6</a:t>
+              <a:t>2026/8/7</a:t>
             </a:fld>
             <a:endParaRPr kumimoji="1" lang="ja-JP" altLang="en-US"/>
           </a:p>
@@ -2123,7 +2124,7 @@
           <a:p>
             <a:fld id="{5E0EB2B4-2A3D-4984-9DB1-40EC1C35540F}" type="datetimeFigureOut">
               <a:rPr kumimoji="1" lang="ja-JP" altLang="en-US" smtClean="0"/>
-              <a:t>2026/8/6</a:t>
+              <a:t>2026/8/7</a:t>
             </a:fld>
             <a:endParaRPr kumimoji="1" lang="ja-JP" altLang="en-US"/>
           </a:p>
@@ -2599,7 +2600,7 @@
           <a:p>
             <a:fld id="{5E0EB2B4-2A3D-4984-9DB1-40EC1C35540F}" type="datetimeFigureOut">
               <a:rPr kumimoji="1" lang="ja-JP" altLang="en-US" smtClean="0"/>
-              <a:t>2026/8/6</a:t>
+              <a:t>2026/8/7</a:t>
             </a:fld>
             <a:endParaRPr kumimoji="1" lang="ja-JP" altLang="en-US"/>
           </a:p>
@@ -2740,7 +2741,7 @@
           <a:p>
             <a:fld id="{5E0EB2B4-2A3D-4984-9DB1-40EC1C35540F}" type="datetimeFigureOut">
               <a:rPr kumimoji="1" lang="ja-JP" altLang="en-US" smtClean="0"/>
-              <a:t>2026/8/6</a:t>
+              <a:t>2026/8/7</a:t>
             </a:fld>
             <a:endParaRPr kumimoji="1" lang="ja-JP" altLang="en-US"/>
           </a:p>
@@ -2853,7 +2854,7 @@
           <a:p>
             <a:fld id="{5E0EB2B4-2A3D-4984-9DB1-40EC1C35540F}" type="datetimeFigureOut">
               <a:rPr kumimoji="1" lang="ja-JP" altLang="en-US" smtClean="0"/>
-              <a:t>2026/8/6</a:t>
+              <a:t>2026/8/7</a:t>
             </a:fld>
             <a:endParaRPr kumimoji="1" lang="ja-JP" altLang="en-US"/>
           </a:p>
@@ -3196,7 +3197,7 @@
           <a:p>
             <a:fld id="{5E0EB2B4-2A3D-4984-9DB1-40EC1C35540F}" type="datetimeFigureOut">
               <a:rPr kumimoji="1" lang="ja-JP" altLang="en-US" smtClean="0"/>
-              <a:t>2026/8/6</a:t>
+              <a:t>2026/8/7</a:t>
             </a:fld>
             <a:endParaRPr kumimoji="1" lang="ja-JP" altLang="en-US"/>
           </a:p>
@@ -3484,7 +3485,7 @@
           <a:p>
             <a:fld id="{5E0EB2B4-2A3D-4984-9DB1-40EC1C35540F}" type="datetimeFigureOut">
               <a:rPr kumimoji="1" lang="ja-JP" altLang="en-US" smtClean="0"/>
-              <a:t>2026/8/6</a:t>
+              <a:t>2026/8/7</a:t>
             </a:fld>
             <a:endParaRPr kumimoji="1" lang="ja-JP" altLang="en-US"/>
           </a:p>
@@ -3757,7 +3758,7 @@
           <a:p>
             <a:fld id="{5E0EB2B4-2A3D-4984-9DB1-40EC1C35540F}" type="datetimeFigureOut">
               <a:rPr kumimoji="1" lang="ja-JP" altLang="en-US" smtClean="0"/>
-              <a:t>2026/8/6</a:t>
+              <a:t>2026/8/7</a:t>
             </a:fld>
             <a:endParaRPr kumimoji="1" lang="ja-JP" altLang="en-US"/>
           </a:p>
@@ -4868,12 +4869,18 @@
 </p:sld>
 </file>
 
-<file path=ppt/slides/slide2.xml><?xml version="1.0" encoding="utf-8"?>
+<file path=ppt/slides/slide10.xml><?xml version="1.0" encoding="utf-8"?>
 <p:sld xmlns:a="http://schemas.openxmlformats.org/drawingml/2006/main" xmlns:r="http://schemas.openxmlformats.org/officeDocument/2006/relationships" xmlns:p="http://schemas.openxmlformats.org/presentationml/2006/main">
   <p:cSld>
     <p:spTree>
       <p:nvGrpSpPr>
-        <p:cNvPr id="1" name=""/>
+        <p:cNvPr id="1" name="">
+          <a:extLst>
+            <a:ext uri="{FF2B5EF4-FFF2-40B4-BE49-F238E27FC236}">
+              <a16:creationId xmlns:a16="http://schemas.microsoft.com/office/drawing/2014/main" id="{B4A67EE9-12A2-74DE-C1FB-B94364638861}"/>
+            </a:ext>
+          </a:extLst>
+        </p:cNvPr>
         <p:cNvGrpSpPr/>
         <p:nvPr/>
       </p:nvGrpSpPr>
@@ -4890,7 +4897,7 @@
           <p:cNvPr id="2" name="タイトル 1">
             <a:extLst>
               <a:ext uri="{FF2B5EF4-FFF2-40B4-BE49-F238E27FC236}">
-                <a16:creationId xmlns:a16="http://schemas.microsoft.com/office/drawing/2014/main" id="{24491BE5-3EE6-D721-6A5E-395C9A611990}"/>
+                <a16:creationId xmlns:a16="http://schemas.microsoft.com/office/drawing/2014/main" id="{041C629E-768B-1990-B75A-BB054222EE86}"/>
               </a:ext>
             </a:extLst>
           </p:cNvPr>
@@ -4903,8 +4910,8 @@
         </p:nvSpPr>
         <p:spPr>
           <a:xfrm>
-            <a:off x="173255" y="365125"/>
-            <a:ext cx="11742821" cy="1325563"/>
+            <a:off x="238152" y="390935"/>
+            <a:ext cx="10515600" cy="1325563"/>
           </a:xfrm>
         </p:spPr>
         <p:txBody>
@@ -4912,120 +4919,157 @@
           <a:lstStyle/>
           <a:p>
             <a:r>
-              <a:rPr lang="ja-JP" altLang="en-US" b="1" dirty="0">
+              <a:rPr lang="ja-JP" altLang="ja-JP" b="1" dirty="0">
                 <a:solidFill>
                   <a:srgbClr val="113160"/>
                 </a:solidFill>
               </a:rPr>
-              <a:t>仮想ネットワーク埋め込み問題（</a:t>
-            </a:r>
-            <a:r>
-              <a:rPr lang="en-US" altLang="ja-JP" b="1" dirty="0">
-                <a:solidFill>
-                  <a:srgbClr val="113160"/>
-                </a:solidFill>
-              </a:rPr>
-              <a:t>VNE</a:t>
-            </a:r>
-            <a:r>
-              <a:rPr lang="ja-JP" altLang="en-US" b="1" dirty="0">
-                <a:solidFill>
-                  <a:srgbClr val="113160"/>
-                </a:solidFill>
-              </a:rPr>
-              <a:t>）</a:t>
-            </a:r>
-            <a:r>
-              <a:rPr kumimoji="1" lang="ja-JP" altLang="en-US" b="1" dirty="0">
-                <a:solidFill>
-                  <a:srgbClr val="113160"/>
-                </a:solidFill>
-              </a:rPr>
-              <a:t>とは</a:t>
-            </a:r>
-          </a:p>
-        </p:txBody>
-      </p:sp>
-      <p:pic>
-        <p:nvPicPr>
-          <p:cNvPr id="6" name="コンテンツ プレースホルダー 5">
-            <a:extLst>
-              <a:ext uri="{FF2B5EF4-FFF2-40B4-BE49-F238E27FC236}">
-                <a16:creationId xmlns:a16="http://schemas.microsoft.com/office/drawing/2014/main" id="{130C6775-BC1F-F467-6CEA-2B03CC35801E}"/>
-              </a:ext>
-            </a:extLst>
-          </p:cNvPr>
-          <p:cNvPicPr>
-            <a:picLocks noGrp="1" noChangeAspect="1"/>
-          </p:cNvPicPr>
-          <p:nvPr>
-            <p:ph idx="1"/>
-          </p:nvPr>
-        </p:nvPicPr>
-        <p:blipFill>
-          <a:blip r:embed="rId3">
-            <a:extLst>
-              <a:ext uri="{28A0092B-C50C-407E-A947-70E740481C1C}">
-                <a14:useLocalDpi xmlns:a14="http://schemas.microsoft.com/office/drawing/2010/main" val="0"/>
-              </a:ext>
-            </a:extLst>
-          </a:blip>
-          <a:stretch>
-            <a:fillRect/>
-          </a:stretch>
-        </p:blipFill>
+              <a:t>今後の課題</a:t>
+            </a:r>
+            <a:endParaRPr kumimoji="1" lang="ja-JP" altLang="en-US" b="1" dirty="0">
+              <a:solidFill>
+                <a:srgbClr val="113160"/>
+              </a:solidFill>
+            </a:endParaRPr>
+          </a:p>
+        </p:txBody>
+      </p:sp>
+      <p:sp>
+        <p:nvSpPr>
+          <p:cNvPr id="8" name="テキスト ボックス 7">
+            <a:extLst>
+              <a:ext uri="{FF2B5EF4-FFF2-40B4-BE49-F238E27FC236}">
+                <a16:creationId xmlns:a16="http://schemas.microsoft.com/office/drawing/2014/main" id="{091A963F-2004-A801-05C0-C0AE2A699ADA}"/>
+              </a:ext>
+            </a:extLst>
+          </p:cNvPr>
+          <p:cNvSpPr txBox="1"/>
+          <p:nvPr/>
+        </p:nvSpPr>
         <p:spPr>
           <a:xfrm>
-            <a:off x="0" y="1690688"/>
-            <a:ext cx="5242850" cy="3005136"/>
+            <a:off x="275924" y="1875811"/>
+            <a:ext cx="3112654" cy="707886"/>
           </a:xfrm>
           <a:prstGeom prst="rect">
             <a:avLst/>
           </a:prstGeom>
+          <a:noFill/>
         </p:spPr>
-      </p:pic>
-      <p:pic>
-        <p:nvPicPr>
-          <p:cNvPr id="10" name="コンテンツ プレースホルダー 4">
-            <a:extLst>
-              <a:ext uri="{FF2B5EF4-FFF2-40B4-BE49-F238E27FC236}">
-                <a16:creationId xmlns:a16="http://schemas.microsoft.com/office/drawing/2014/main" id="{70B33377-3451-BCF8-76CF-7A74D79BBAE5}"/>
-              </a:ext>
-            </a:extLst>
-          </p:cNvPr>
-          <p:cNvPicPr>
-            <a:picLocks noChangeAspect="1"/>
-          </p:cNvPicPr>
+        <p:txBody>
+          <a:bodyPr wrap="square" rtlCol="0">
+            <a:spAutoFit/>
+          </a:bodyPr>
+          <a:lstStyle/>
+          <a:p>
+            <a:r>
+              <a:rPr kumimoji="1" lang="ja-JP" altLang="en-US" sz="4000" dirty="0">
+                <a:solidFill>
+                  <a:srgbClr val="0B3E8D"/>
+                </a:solidFill>
+              </a:rPr>
+              <a:t>今後の課題</a:t>
+            </a:r>
+          </a:p>
+        </p:txBody>
+      </p:sp>
+      <p:sp>
+        <p:nvSpPr>
+          <p:cNvPr id="9" name="テキスト ボックス 8">
+            <a:extLst>
+              <a:ext uri="{FF2B5EF4-FFF2-40B4-BE49-F238E27FC236}">
+                <a16:creationId xmlns:a16="http://schemas.microsoft.com/office/drawing/2014/main" id="{D280DD44-192D-7E75-369A-814BD8857AEA}"/>
+              </a:ext>
+            </a:extLst>
+          </p:cNvPr>
+          <p:cNvSpPr txBox="1"/>
           <p:nvPr/>
-        </p:nvPicPr>
-        <p:blipFill>
-          <a:blip r:embed="rId4">
-            <a:extLst>
-              <a:ext uri="{28A0092B-C50C-407E-A947-70E740481C1C}">
-                <a14:useLocalDpi xmlns:a14="http://schemas.microsoft.com/office/drawing/2010/main" val="0"/>
-              </a:ext>
-            </a:extLst>
-          </a:blip>
-          <a:stretch>
-            <a:fillRect/>
-          </a:stretch>
-        </p:blipFill>
+        </p:nvSpPr>
         <p:spPr>
           <a:xfrm>
-            <a:off x="7094926" y="1690688"/>
-            <a:ext cx="4347002" cy="3005136"/>
+            <a:off x="1679334" y="2743010"/>
+            <a:ext cx="7239582" cy="4524315"/>
           </a:xfrm>
           <a:prstGeom prst="rect">
             <a:avLst/>
           </a:prstGeom>
+          <a:noFill/>
         </p:spPr>
-      </p:pic>
-      <p:sp>
-        <p:nvSpPr>
-          <p:cNvPr id="11" name="矢印: 右 10">
-            <a:extLst>
-              <a:ext uri="{FF2B5EF4-FFF2-40B4-BE49-F238E27FC236}">
-                <a16:creationId xmlns:a16="http://schemas.microsoft.com/office/drawing/2014/main" id="{6B43BD15-AECD-DB1F-1EC1-72C2F0584FBD}"/>
+        <p:txBody>
+          <a:bodyPr wrap="square" rtlCol="0">
+            <a:spAutoFit/>
+          </a:bodyPr>
+          <a:lstStyle/>
+          <a:p>
+            <a:pPr lvl="0"/>
+            <a:r>
+              <a:rPr lang="ja-JP" altLang="en-US" sz="3200" dirty="0"/>
+              <a:t>・物理</a:t>
+            </a:r>
+            <a:r>
+              <a:rPr lang="ja-JP" altLang="ja-JP" sz="3200" dirty="0"/>
+              <a:t>ノード数を固定し，</a:t>
+            </a:r>
+            <a:r>
+              <a:rPr lang="ja-JP" altLang="en-US" sz="3200" dirty="0"/>
+              <a:t>実験を行う</a:t>
+            </a:r>
+            <a:r>
+              <a:rPr lang="ja-JP" altLang="ja-JP" sz="3200" dirty="0"/>
+              <a:t>する </a:t>
+            </a:r>
+            <a:endParaRPr lang="en-US" altLang="ja-JP" sz="3200" dirty="0"/>
+          </a:p>
+          <a:p>
+            <a:pPr lvl="0"/>
+            <a:endParaRPr lang="ja-JP" altLang="ja-JP" sz="3200" dirty="0"/>
+          </a:p>
+          <a:p>
+            <a:pPr lvl="0"/>
+            <a:r>
+              <a:rPr lang="ja-JP" altLang="en-US" sz="3200" dirty="0"/>
+              <a:t>・</a:t>
+            </a:r>
+            <a:r>
+              <a:rPr lang="ja-JP" altLang="ja-JP" sz="3200" dirty="0"/>
+              <a:t>処理別の実行時間と棄却数を計測し，時間差の要因を</a:t>
+            </a:r>
+            <a:r>
+              <a:rPr lang="ja-JP" altLang="en-US" sz="3200" dirty="0"/>
+              <a:t>見つける</a:t>
+            </a:r>
+            <a:r>
+              <a:rPr lang="ja-JP" altLang="ja-JP" sz="3200" dirty="0"/>
+              <a:t> </a:t>
+            </a:r>
+            <a:endParaRPr lang="en-US" altLang="ja-JP" sz="3200" dirty="0"/>
+          </a:p>
+          <a:p>
+            <a:pPr lvl="0"/>
+            <a:endParaRPr lang="ja-JP" altLang="ja-JP" sz="3200" dirty="0"/>
+          </a:p>
+          <a:p>
+            <a:pPr lvl="0"/>
+            <a:r>
+              <a:rPr lang="ja-JP" altLang="en-US" sz="3200" dirty="0"/>
+              <a:t>・</a:t>
+            </a:r>
+            <a:r>
+              <a:rPr lang="ja-JP" altLang="ja-JP" sz="3200" dirty="0"/>
+              <a:t>有向グラフを無向グラフへ変更し，再評価する</a:t>
+            </a:r>
+          </a:p>
+          <a:p>
+            <a:endParaRPr kumimoji="1" lang="ja-JP" altLang="en-US" sz="3200" dirty="0"/>
+          </a:p>
+        </p:txBody>
+      </p:sp>
+      <p:sp>
+        <p:nvSpPr>
+          <p:cNvPr id="4" name="正方形/長方形 3">
+            <a:extLst>
+              <a:ext uri="{FF2B5EF4-FFF2-40B4-BE49-F238E27FC236}">
+                <a16:creationId xmlns:a16="http://schemas.microsoft.com/office/drawing/2014/main" id="{8AD5622F-D80E-4042-1FCB-6D3A0D4111F0}"/>
               </a:ext>
             </a:extLst>
           </p:cNvPr>
@@ -5034,15 +5078,17 @@
         </p:nvSpPr>
         <p:spPr>
           <a:xfrm>
-            <a:off x="5544152" y="2846746"/>
-            <a:ext cx="1405000" cy="693019"/>
+            <a:off x="173255" y="646545"/>
+            <a:ext cx="102669" cy="720748"/>
           </a:xfrm>
-          <a:prstGeom prst="rightArrow">
+          <a:prstGeom prst="rect">
             <a:avLst/>
           </a:prstGeom>
-          <a:solidFill>
-            <a:srgbClr val="0F7C86"/>
-          </a:solidFill>
+          <a:ln>
+            <a:solidFill>
+              <a:schemeClr val="bg1"/>
+            </a:solidFill>
+          </a:ln>
         </p:spPr>
         <p:style>
           <a:lnRef idx="2">
@@ -5065,166 +5111,20 @@
           <a:lstStyle/>
           <a:p>
             <a:pPr algn="ctr"/>
-            <a:endParaRPr kumimoji="1" lang="ja-JP" altLang="en-US" dirty="0">
+            <a:endParaRPr kumimoji="1" lang="ja-JP" altLang="en-US">
               <a:solidFill>
-                <a:srgbClr val="0F7C86"/>
+                <a:srgbClr val="113160"/>
               </a:solidFill>
-              <a:highlight>
-                <a:srgbClr val="008000"/>
-              </a:highlight>
             </a:endParaRPr>
           </a:p>
         </p:txBody>
       </p:sp>
       <p:sp>
         <p:nvSpPr>
-          <p:cNvPr id="12" name="テキスト ボックス 11">
-            <a:extLst>
-              <a:ext uri="{FF2B5EF4-FFF2-40B4-BE49-F238E27FC236}">
-                <a16:creationId xmlns:a16="http://schemas.microsoft.com/office/drawing/2014/main" id="{B3F3FDBF-64BF-2C77-9AA0-44FE370255FF}"/>
-              </a:ext>
-            </a:extLst>
-          </p:cNvPr>
-          <p:cNvSpPr txBox="1"/>
-          <p:nvPr/>
-        </p:nvSpPr>
-        <p:spPr>
-          <a:xfrm>
-            <a:off x="477911" y="4873731"/>
-            <a:ext cx="5242849" cy="400110"/>
-          </a:xfrm>
-          <a:prstGeom prst="rect">
-            <a:avLst/>
-          </a:prstGeom>
-          <a:noFill/>
-        </p:spPr>
-        <p:txBody>
-          <a:bodyPr wrap="square" rtlCol="0">
-            <a:spAutoFit/>
-          </a:bodyPr>
-          <a:lstStyle/>
-          <a:p>
-            <a:r>
-              <a:rPr kumimoji="1" lang="ja-JP" altLang="en-US" sz="2000" dirty="0">
-                <a:solidFill>
-                  <a:srgbClr val="0B3E8D"/>
-                </a:solidFill>
-              </a:rPr>
-              <a:t>埋め込み前：</a:t>
-            </a:r>
-            <a:r>
-              <a:rPr kumimoji="1" lang="en-US" altLang="ja-JP" sz="2000" dirty="0">
-                <a:solidFill>
-                  <a:srgbClr val="0B3E8D"/>
-                </a:solidFill>
-              </a:rPr>
-              <a:t>VN</a:t>
-            </a:r>
-            <a:r>
-              <a:rPr kumimoji="1" lang="ja-JP" altLang="en-US" sz="2000" dirty="0">
-                <a:solidFill>
-                  <a:srgbClr val="0B3E8D"/>
-                </a:solidFill>
-              </a:rPr>
-              <a:t>要求と物理ネットワーク</a:t>
-            </a:r>
-          </a:p>
-        </p:txBody>
-      </p:sp>
-      <p:sp>
-        <p:nvSpPr>
-          <p:cNvPr id="13" name="テキスト ボックス 12">
-            <a:extLst>
-              <a:ext uri="{FF2B5EF4-FFF2-40B4-BE49-F238E27FC236}">
-                <a16:creationId xmlns:a16="http://schemas.microsoft.com/office/drawing/2014/main" id="{ACC6FC94-995F-15BA-0B48-B6B01E3D169F}"/>
-              </a:ext>
-            </a:extLst>
-          </p:cNvPr>
-          <p:cNvSpPr txBox="1"/>
-          <p:nvPr/>
-        </p:nvSpPr>
-        <p:spPr>
-          <a:xfrm>
-            <a:off x="7277727" y="4904509"/>
-            <a:ext cx="4164201" cy="400110"/>
-          </a:xfrm>
-          <a:prstGeom prst="rect">
-            <a:avLst/>
-          </a:prstGeom>
-          <a:noFill/>
-        </p:spPr>
-        <p:txBody>
-          <a:bodyPr wrap="square" rtlCol="0">
-            <a:spAutoFit/>
-          </a:bodyPr>
-          <a:lstStyle/>
-          <a:p>
-            <a:r>
-              <a:rPr kumimoji="1" lang="ja-JP" altLang="en-US" sz="2000" dirty="0">
-                <a:solidFill>
-                  <a:srgbClr val="0B3E8D"/>
-                </a:solidFill>
-              </a:rPr>
-              <a:t>埋め込み後：物理資源へ割り当て</a:t>
-            </a:r>
-          </a:p>
-        </p:txBody>
-      </p:sp>
-      <p:sp>
-        <p:nvSpPr>
-          <p:cNvPr id="14" name="テキスト ボックス 13">
-            <a:extLst>
-              <a:ext uri="{FF2B5EF4-FFF2-40B4-BE49-F238E27FC236}">
-                <a16:creationId xmlns:a16="http://schemas.microsoft.com/office/drawing/2014/main" id="{5703DA41-E463-0971-E551-B19E443C9449}"/>
-              </a:ext>
-            </a:extLst>
-          </p:cNvPr>
-          <p:cNvSpPr txBox="1"/>
-          <p:nvPr/>
-        </p:nvSpPr>
-        <p:spPr>
-          <a:xfrm>
-            <a:off x="591127" y="5569527"/>
-            <a:ext cx="9670473" cy="646331"/>
-          </a:xfrm>
-          <a:prstGeom prst="rect">
-            <a:avLst/>
-          </a:prstGeom>
-          <a:noFill/>
-        </p:spPr>
-        <p:txBody>
-          <a:bodyPr wrap="square" rtlCol="0">
-            <a:spAutoFit/>
-          </a:bodyPr>
-          <a:lstStyle/>
-          <a:p>
-            <a:r>
-              <a:rPr kumimoji="1" lang="ja-JP" altLang="en-US" dirty="0"/>
-              <a:t>仮想ノードは</a:t>
-            </a:r>
-            <a:r>
-              <a:rPr kumimoji="1" lang="en-US" altLang="ja-JP" dirty="0"/>
-              <a:t>CPU</a:t>
-            </a:r>
-            <a:r>
-              <a:rPr kumimoji="1" lang="ja-JP" altLang="en-US" dirty="0"/>
-              <a:t>需要，仮想リンクは帯域幅需要を持つ。</a:t>
-            </a:r>
-          </a:p>
-          <a:p>
-            <a:r>
-              <a:rPr kumimoji="1" lang="ja-JP" altLang="en-US" dirty="0"/>
-              <a:t>需要を満たす物理ノード・物理リンクへ割り当てられれば受理，できなければ棄却。</a:t>
-            </a:r>
-          </a:p>
-        </p:txBody>
-      </p:sp>
-      <p:sp>
-        <p:nvSpPr>
-          <p:cNvPr id="4" name="正方形/長方形 3">
-            <a:extLst>
-              <a:ext uri="{FF2B5EF4-FFF2-40B4-BE49-F238E27FC236}">
-                <a16:creationId xmlns:a16="http://schemas.microsoft.com/office/drawing/2014/main" id="{F8B476B1-3DD4-17F7-488C-C438E3962B03}"/>
+          <p:cNvPr id="10" name="正方形/長方形 9">
+            <a:extLst>
+              <a:ext uri="{FF2B5EF4-FFF2-40B4-BE49-F238E27FC236}">
+                <a16:creationId xmlns:a16="http://schemas.microsoft.com/office/drawing/2014/main" id="{2805C457-A245-313D-964B-11AAB0050FE0}"/>
               </a:ext>
             </a:extLst>
           </p:cNvPr>
@@ -5274,6 +5174,444 @@
           </a:p>
         </p:txBody>
       </p:sp>
+    </p:spTree>
+    <p:extLst>
+      <p:ext uri="{BB962C8B-B14F-4D97-AF65-F5344CB8AC3E}">
+        <p14:creationId xmlns:p14="http://schemas.microsoft.com/office/powerpoint/2010/main" val="3885014910"/>
+      </p:ext>
+    </p:extLst>
+  </p:cSld>
+  <p:clrMapOvr>
+    <a:masterClrMapping/>
+  </p:clrMapOvr>
+</p:sld>
+</file>
+
+<file path=ppt/slides/slide2.xml><?xml version="1.0" encoding="utf-8"?>
+<p:sld xmlns:a="http://schemas.openxmlformats.org/drawingml/2006/main" xmlns:r="http://schemas.openxmlformats.org/officeDocument/2006/relationships" xmlns:p="http://schemas.openxmlformats.org/presentationml/2006/main">
+  <p:cSld>
+    <p:spTree>
+      <p:nvGrpSpPr>
+        <p:cNvPr id="1" name=""/>
+        <p:cNvGrpSpPr/>
+        <p:nvPr/>
+      </p:nvGrpSpPr>
+      <p:grpSpPr>
+        <a:xfrm>
+          <a:off x="0" y="0"/>
+          <a:ext cx="0" cy="0"/>
+          <a:chOff x="0" y="0"/>
+          <a:chExt cx="0" cy="0"/>
+        </a:xfrm>
+      </p:grpSpPr>
+      <p:sp>
+        <p:nvSpPr>
+          <p:cNvPr id="2" name="タイトル 1">
+            <a:extLst>
+              <a:ext uri="{FF2B5EF4-FFF2-40B4-BE49-F238E27FC236}">
+                <a16:creationId xmlns:a16="http://schemas.microsoft.com/office/drawing/2014/main" id="{24491BE5-3EE6-D721-6A5E-395C9A611990}"/>
+              </a:ext>
+            </a:extLst>
+          </p:cNvPr>
+          <p:cNvSpPr>
+            <a:spLocks noGrp="1"/>
+          </p:cNvSpPr>
+          <p:nvPr>
+            <p:ph type="title"/>
+          </p:nvPr>
+        </p:nvSpPr>
+        <p:spPr>
+          <a:xfrm>
+            <a:off x="173255" y="365125"/>
+            <a:ext cx="11742821" cy="1325563"/>
+          </a:xfrm>
+        </p:spPr>
+        <p:txBody>
+          <a:bodyPr/>
+          <a:lstStyle/>
+          <a:p>
+            <a:r>
+              <a:rPr lang="ja-JP" altLang="en-US" b="1" dirty="0">
+                <a:solidFill>
+                  <a:srgbClr val="113160"/>
+                </a:solidFill>
+              </a:rPr>
+              <a:t>仮想ネットワーク埋め込み問題（</a:t>
+            </a:r>
+            <a:r>
+              <a:rPr lang="en-US" altLang="ja-JP" b="1" dirty="0">
+                <a:solidFill>
+                  <a:srgbClr val="113160"/>
+                </a:solidFill>
+              </a:rPr>
+              <a:t>VNE</a:t>
+            </a:r>
+            <a:r>
+              <a:rPr lang="ja-JP" altLang="en-US" b="1" dirty="0">
+                <a:solidFill>
+                  <a:srgbClr val="113160"/>
+                </a:solidFill>
+              </a:rPr>
+              <a:t>）</a:t>
+            </a:r>
+            <a:r>
+              <a:rPr kumimoji="1" lang="ja-JP" altLang="en-US" b="1" dirty="0">
+                <a:solidFill>
+                  <a:srgbClr val="113160"/>
+                </a:solidFill>
+              </a:rPr>
+              <a:t>とは</a:t>
+            </a:r>
+          </a:p>
+        </p:txBody>
+      </p:sp>
+      <p:pic>
+        <p:nvPicPr>
+          <p:cNvPr id="6" name="コンテンツ プレースホルダー 5">
+            <a:extLst>
+              <a:ext uri="{FF2B5EF4-FFF2-40B4-BE49-F238E27FC236}">
+                <a16:creationId xmlns:a16="http://schemas.microsoft.com/office/drawing/2014/main" id="{130C6775-BC1F-F467-6CEA-2B03CC35801E}"/>
+              </a:ext>
+            </a:extLst>
+          </p:cNvPr>
+          <p:cNvPicPr>
+            <a:picLocks noGrp="1" noChangeAspect="1"/>
+          </p:cNvPicPr>
+          <p:nvPr>
+            <p:ph idx="1"/>
+          </p:nvPr>
+        </p:nvPicPr>
+        <p:blipFill>
+          <a:blip r:embed="rId3">
+            <a:extLst>
+              <a:ext uri="{28A0092B-C50C-407E-A947-70E740481C1C}">
+                <a14:useLocalDpi xmlns:a14="http://schemas.microsoft.com/office/drawing/2010/main" val="0"/>
+              </a:ext>
+            </a:extLst>
+          </a:blip>
+          <a:stretch>
+            <a:fillRect/>
+          </a:stretch>
+        </p:blipFill>
+        <p:spPr>
+          <a:xfrm>
+            <a:off x="591127" y="1768395"/>
+            <a:ext cx="4464804" cy="2559170"/>
+          </a:xfrm>
+          <a:prstGeom prst="rect">
+            <a:avLst/>
+          </a:prstGeom>
+        </p:spPr>
+      </p:pic>
+      <p:pic>
+        <p:nvPicPr>
+          <p:cNvPr id="10" name="コンテンツ プレースホルダー 4">
+            <a:extLst>
+              <a:ext uri="{FF2B5EF4-FFF2-40B4-BE49-F238E27FC236}">
+                <a16:creationId xmlns:a16="http://schemas.microsoft.com/office/drawing/2014/main" id="{70B33377-3451-BCF8-76CF-7A74D79BBAE5}"/>
+              </a:ext>
+            </a:extLst>
+          </p:cNvPr>
+          <p:cNvPicPr>
+            <a:picLocks noChangeAspect="1"/>
+          </p:cNvPicPr>
+          <p:nvPr/>
+        </p:nvPicPr>
+        <p:blipFill>
+          <a:blip r:embed="rId4">
+            <a:extLst>
+              <a:ext uri="{28A0092B-C50C-407E-A947-70E740481C1C}">
+                <a14:useLocalDpi xmlns:a14="http://schemas.microsoft.com/office/drawing/2010/main" val="0"/>
+              </a:ext>
+            </a:extLst>
+          </a:blip>
+          <a:stretch>
+            <a:fillRect/>
+          </a:stretch>
+        </p:blipFill>
+        <p:spPr>
+          <a:xfrm>
+            <a:off x="7094925" y="1711212"/>
+            <a:ext cx="3966851" cy="2742333"/>
+          </a:xfrm>
+          <a:prstGeom prst="rect">
+            <a:avLst/>
+          </a:prstGeom>
+        </p:spPr>
+      </p:pic>
+      <p:sp>
+        <p:nvSpPr>
+          <p:cNvPr id="11" name="矢印: 右 10">
+            <a:extLst>
+              <a:ext uri="{FF2B5EF4-FFF2-40B4-BE49-F238E27FC236}">
+                <a16:creationId xmlns:a16="http://schemas.microsoft.com/office/drawing/2014/main" id="{6B43BD15-AECD-DB1F-1EC1-72C2F0584FBD}"/>
+              </a:ext>
+            </a:extLst>
+          </p:cNvPr>
+          <p:cNvSpPr/>
+          <p:nvPr/>
+        </p:nvSpPr>
+        <p:spPr>
+          <a:xfrm>
+            <a:off x="5372928" y="2735870"/>
+            <a:ext cx="1405000" cy="693019"/>
+          </a:xfrm>
+          <a:prstGeom prst="rightArrow">
+            <a:avLst/>
+          </a:prstGeom>
+          <a:solidFill>
+            <a:srgbClr val="0F7C86"/>
+          </a:solidFill>
+        </p:spPr>
+        <p:style>
+          <a:lnRef idx="2">
+            <a:schemeClr val="accent1">
+              <a:shade val="15000"/>
+            </a:schemeClr>
+          </a:lnRef>
+          <a:fillRef idx="1">
+            <a:schemeClr val="accent1"/>
+          </a:fillRef>
+          <a:effectRef idx="0">
+            <a:schemeClr val="accent1"/>
+          </a:effectRef>
+          <a:fontRef idx="minor">
+            <a:schemeClr val="lt1"/>
+          </a:fontRef>
+        </p:style>
+        <p:txBody>
+          <a:bodyPr rtlCol="0" anchor="ctr"/>
+          <a:lstStyle/>
+          <a:p>
+            <a:pPr algn="ctr"/>
+            <a:endParaRPr kumimoji="1" lang="ja-JP" altLang="en-US" dirty="0">
+              <a:solidFill>
+                <a:srgbClr val="0F7C86"/>
+              </a:solidFill>
+              <a:highlight>
+                <a:srgbClr val="008000"/>
+              </a:highlight>
+            </a:endParaRPr>
+          </a:p>
+        </p:txBody>
+      </p:sp>
+      <p:sp>
+        <p:nvSpPr>
+          <p:cNvPr id="12" name="テキスト ボックス 11">
+            <a:extLst>
+              <a:ext uri="{FF2B5EF4-FFF2-40B4-BE49-F238E27FC236}">
+                <a16:creationId xmlns:a16="http://schemas.microsoft.com/office/drawing/2014/main" id="{B3F3FDBF-64BF-2C77-9AA0-44FE370255FF}"/>
+              </a:ext>
+            </a:extLst>
+          </p:cNvPr>
+          <p:cNvSpPr txBox="1"/>
+          <p:nvPr/>
+        </p:nvSpPr>
+        <p:spPr>
+          <a:xfrm>
+            <a:off x="477911" y="4873731"/>
+            <a:ext cx="5242849" cy="400110"/>
+          </a:xfrm>
+          <a:prstGeom prst="rect">
+            <a:avLst/>
+          </a:prstGeom>
+          <a:noFill/>
+        </p:spPr>
+        <p:txBody>
+          <a:bodyPr wrap="square" rtlCol="0">
+            <a:spAutoFit/>
+          </a:bodyPr>
+          <a:lstStyle/>
+          <a:p>
+            <a:r>
+              <a:rPr kumimoji="1" lang="ja-JP" altLang="en-US" sz="2000" dirty="0">
+                <a:solidFill>
+                  <a:srgbClr val="0B3E8D"/>
+                </a:solidFill>
+              </a:rPr>
+              <a:t>埋め込み前：</a:t>
+            </a:r>
+            <a:r>
+              <a:rPr kumimoji="1" lang="en-US" altLang="ja-JP" sz="2000" dirty="0">
+                <a:solidFill>
+                  <a:srgbClr val="0B3E8D"/>
+                </a:solidFill>
+              </a:rPr>
+              <a:t>VN</a:t>
+            </a:r>
+            <a:r>
+              <a:rPr kumimoji="1" lang="ja-JP" altLang="en-US" sz="2000" dirty="0">
+                <a:solidFill>
+                  <a:srgbClr val="0B3E8D"/>
+                </a:solidFill>
+              </a:rPr>
+              <a:t>要求と物理ネットワーク</a:t>
+            </a:r>
+          </a:p>
+        </p:txBody>
+      </p:sp>
+      <p:sp>
+        <p:nvSpPr>
+          <p:cNvPr id="13" name="テキスト ボックス 12">
+            <a:extLst>
+              <a:ext uri="{FF2B5EF4-FFF2-40B4-BE49-F238E27FC236}">
+                <a16:creationId xmlns:a16="http://schemas.microsoft.com/office/drawing/2014/main" id="{ACC6FC94-995F-15BA-0B48-B6B01E3D169F}"/>
+              </a:ext>
+            </a:extLst>
+          </p:cNvPr>
+          <p:cNvSpPr txBox="1"/>
+          <p:nvPr/>
+        </p:nvSpPr>
+        <p:spPr>
+          <a:xfrm>
+            <a:off x="7277727" y="4904509"/>
+            <a:ext cx="4164201" cy="400110"/>
+          </a:xfrm>
+          <a:prstGeom prst="rect">
+            <a:avLst/>
+          </a:prstGeom>
+          <a:noFill/>
+        </p:spPr>
+        <p:txBody>
+          <a:bodyPr wrap="square" rtlCol="0">
+            <a:spAutoFit/>
+          </a:bodyPr>
+          <a:lstStyle/>
+          <a:p>
+            <a:r>
+              <a:rPr kumimoji="1" lang="ja-JP" altLang="en-US" sz="2000" dirty="0">
+                <a:solidFill>
+                  <a:srgbClr val="0B3E8D"/>
+                </a:solidFill>
+              </a:rPr>
+              <a:t>埋め込み後：物理資源へ割り当て</a:t>
+            </a:r>
+          </a:p>
+        </p:txBody>
+      </p:sp>
+      <p:sp>
+        <p:nvSpPr>
+          <p:cNvPr id="14" name="テキスト ボックス 13">
+            <a:extLst>
+              <a:ext uri="{FF2B5EF4-FFF2-40B4-BE49-F238E27FC236}">
+                <a16:creationId xmlns:a16="http://schemas.microsoft.com/office/drawing/2014/main" id="{5703DA41-E463-0971-E551-B19E443C9449}"/>
+              </a:ext>
+            </a:extLst>
+          </p:cNvPr>
+          <p:cNvSpPr txBox="1"/>
+          <p:nvPr/>
+        </p:nvSpPr>
+        <p:spPr>
+          <a:xfrm>
+            <a:off x="591127" y="5569527"/>
+            <a:ext cx="9670473" cy="923330"/>
+          </a:xfrm>
+          <a:prstGeom prst="rect">
+            <a:avLst/>
+          </a:prstGeom>
+          <a:noFill/>
+        </p:spPr>
+        <p:txBody>
+          <a:bodyPr wrap="square" rtlCol="0">
+            <a:spAutoFit/>
+          </a:bodyPr>
+          <a:lstStyle/>
+          <a:p>
+            <a:r>
+              <a:rPr kumimoji="1" lang="ja-JP" altLang="en-US" dirty="0"/>
+              <a:t>仮想ノードは</a:t>
+            </a:r>
+            <a:r>
+              <a:rPr kumimoji="1" lang="en-US" altLang="ja-JP" dirty="0"/>
+              <a:t>CPU</a:t>
+            </a:r>
+            <a:r>
+              <a:rPr kumimoji="1" lang="ja-JP" altLang="en-US" dirty="0"/>
+              <a:t>需要，仮想リンクは帯域幅需要を持つ。</a:t>
+            </a:r>
+          </a:p>
+          <a:p>
+            <a:r>
+              <a:rPr kumimoji="1" lang="ja-JP" altLang="en-US" dirty="0"/>
+              <a:t>需要を満たす物理ノード・物理リンクへ割り当てられれば受理，できなければ棄却。</a:t>
+            </a:r>
+            <a:br>
+              <a:rPr kumimoji="1" lang="en-US" altLang="ja-JP" dirty="0"/>
+            </a:br>
+            <a:r>
+              <a:rPr kumimoji="1" lang="en-US" altLang="ja-JP" dirty="0"/>
+              <a:t>VNE</a:t>
+            </a:r>
+            <a:r>
+              <a:rPr kumimoji="1" lang="ja-JP" altLang="en-US" dirty="0"/>
+              <a:t>は</a:t>
+            </a:r>
+            <a:r>
+              <a:rPr kumimoji="1" lang="en-US" altLang="ja-JP" dirty="0"/>
+              <a:t>NP</a:t>
+            </a:r>
+            <a:r>
+              <a:rPr kumimoji="1" lang="ja-JP" altLang="en-US" dirty="0"/>
+              <a:t>困難である</a:t>
+            </a:r>
+          </a:p>
+        </p:txBody>
+      </p:sp>
+      <p:sp>
+        <p:nvSpPr>
+          <p:cNvPr id="4" name="正方形/長方形 3">
+            <a:extLst>
+              <a:ext uri="{FF2B5EF4-FFF2-40B4-BE49-F238E27FC236}">
+                <a16:creationId xmlns:a16="http://schemas.microsoft.com/office/drawing/2014/main" id="{F8B476B1-3DD4-17F7-488C-C438E3962B03}"/>
+              </a:ext>
+            </a:extLst>
+          </p:cNvPr>
+          <p:cNvSpPr/>
+          <p:nvPr/>
+        </p:nvSpPr>
+        <p:spPr>
+          <a:xfrm>
+            <a:off x="275924" y="1302328"/>
+            <a:ext cx="10889672" cy="64965"/>
+          </a:xfrm>
+          <a:prstGeom prst="rect">
+            <a:avLst/>
+          </a:prstGeom>
+          <a:ln>
+            <a:solidFill>
+              <a:schemeClr val="bg1"/>
+            </a:solidFill>
+          </a:ln>
+        </p:spPr>
+        <p:style>
+          <a:lnRef idx="2">
+            <a:schemeClr val="accent1">
+              <a:shade val="15000"/>
+            </a:schemeClr>
+          </a:lnRef>
+          <a:fillRef idx="1">
+            <a:schemeClr val="accent1"/>
+          </a:fillRef>
+          <a:effectRef idx="0">
+            <a:schemeClr val="accent1"/>
+          </a:effectRef>
+          <a:fontRef idx="minor">
+            <a:schemeClr val="lt1"/>
+          </a:fontRef>
+        </p:style>
+        <p:txBody>
+          <a:bodyPr rtlCol="0" anchor="ctr"/>
+          <a:lstStyle/>
+          <a:p>
+            <a:pPr algn="ctr"/>
+            <a:endParaRPr kumimoji="1" lang="ja-JP" altLang="en-US">
+              <a:solidFill>
+                <a:srgbClr val="113160"/>
+              </a:solidFill>
+            </a:endParaRPr>
+          </a:p>
+        </p:txBody>
+      </p:sp>
       <p:sp>
         <p:nvSpPr>
           <p:cNvPr id="5" name="正方形/長方形 4">
@@ -5462,8 +5800,8 @@
         </p:nvSpPr>
         <p:spPr>
           <a:xfrm>
-            <a:off x="600364" y="2346036"/>
-            <a:ext cx="5495636" cy="2308324"/>
+            <a:off x="632287" y="2372306"/>
+            <a:ext cx="5983563" cy="3416320"/>
           </a:xfrm>
           <a:prstGeom prst="rect">
             <a:avLst/>
@@ -5478,23 +5816,41 @@
           <a:p>
             <a:r>
               <a:rPr kumimoji="1" lang="ja-JP" altLang="en-US" sz="2400" dirty="0"/>
-              <a:t>帯域幅需要を満たす物理リンクを抽出</a:t>
+              <a:t>１．帯域幅需要を満たす物理リンク</a:t>
             </a:r>
             <a:endParaRPr kumimoji="1" lang="en-US" altLang="ja-JP" sz="2400" dirty="0"/>
           </a:p>
           <a:p>
+            <a:r>
+              <a:rPr kumimoji="1" lang="ja-JP" altLang="en-US" sz="2400" dirty="0"/>
+              <a:t>を抽出</a:t>
+            </a:r>
+            <a:endParaRPr kumimoji="1" lang="en-US" altLang="ja-JP" sz="2400" dirty="0"/>
+          </a:p>
+          <a:p>
             <a:endParaRPr kumimoji="1" lang="ja-JP" altLang="en-US" sz="2400" dirty="0"/>
           </a:p>
           <a:p>
             <a:r>
               <a:rPr kumimoji="1" lang="ja-JP" altLang="en-US" sz="2400" dirty="0"/>
-              <a:t>その端点を仮想ノードの割当候補にする</a:t>
-            </a:r>
+              <a:t>２．その端点を仮想ノードの</a:t>
+            </a:r>
+            <a:endParaRPr kumimoji="1" lang="en-US" altLang="ja-JP" sz="2400" dirty="0"/>
           </a:p>
           <a:p>
             <a:r>
               <a:rPr kumimoji="1" lang="ja-JP" altLang="en-US" sz="2400" dirty="0"/>
-              <a:t>候補の中から</a:t>
+              <a:t>割当候補にする</a:t>
+            </a:r>
+            <a:endParaRPr kumimoji="1" lang="en-US" altLang="ja-JP" sz="2400" dirty="0"/>
+          </a:p>
+          <a:p>
+            <a:endParaRPr kumimoji="1" lang="en-US" altLang="ja-JP" sz="2400" dirty="0"/>
+          </a:p>
+          <a:p>
+            <a:r>
+              <a:rPr kumimoji="1" lang="ja-JP" altLang="en-US" sz="2400" dirty="0"/>
+              <a:t>３．候補の中から</a:t>
             </a:r>
             <a:r>
               <a:rPr kumimoji="1" lang="en-US" altLang="ja-JP" sz="2400" dirty="0"/>
@@ -5502,8 +5858,19 @@
             </a:r>
             <a:r>
               <a:rPr kumimoji="1" lang="ja-JP" altLang="en-US" sz="2400" dirty="0"/>
-              <a:t>資源が最大の物理ノードを選ぶ</a:t>
-            </a:r>
+              <a:t>資源が最大の</a:t>
+            </a:r>
+            <a:endParaRPr kumimoji="1" lang="en-US" altLang="ja-JP" sz="2400" dirty="0"/>
+          </a:p>
+          <a:p>
+            <a:r>
+              <a:rPr kumimoji="1" lang="ja-JP" altLang="en-US" sz="2400" dirty="0"/>
+              <a:t>物理ノードを選ぶ</a:t>
+            </a:r>
+            <a:endParaRPr kumimoji="1" lang="en-US" altLang="ja-JP" sz="2400" dirty="0"/>
+          </a:p>
+          <a:p>
+            <a:endParaRPr kumimoji="1" lang="ja-JP" altLang="en-US" sz="2400" dirty="0"/>
           </a:p>
         </p:txBody>
       </p:sp>
@@ -5521,8 +5888,8 @@
         </p:nvSpPr>
         <p:spPr>
           <a:xfrm>
-            <a:off x="6483928" y="2346036"/>
-            <a:ext cx="5107707" cy="2308324"/>
+            <a:off x="6096000" y="2349541"/>
+            <a:ext cx="6219198" cy="3046988"/>
           </a:xfrm>
           <a:prstGeom prst="rect">
             <a:avLst/>
@@ -5536,24 +5903,57 @@
           <a:lstStyle/>
           <a:p>
             <a:r>
+              <a:rPr kumimoji="1" lang="ja-JP" altLang="en-US" sz="2400" dirty="0"/>
+              <a:t>１．</a:t>
+            </a:r>
+            <a:r>
               <a:rPr kumimoji="1" lang="en-US" altLang="ja-JP" sz="2400" dirty="0"/>
               <a:t>CPU</a:t>
             </a:r>
             <a:r>
               <a:rPr kumimoji="1" lang="ja-JP" altLang="en-US" sz="2400" dirty="0"/>
-              <a:t>需要を満たす物理ノードを候補にする</a:t>
-            </a:r>
+              <a:t>需要を満たす物理ノードを</a:t>
+            </a:r>
+            <a:endParaRPr kumimoji="1" lang="en-US" altLang="ja-JP" sz="2400" dirty="0"/>
           </a:p>
           <a:p>
             <a:r>
               <a:rPr kumimoji="1" lang="ja-JP" altLang="en-US" sz="2400" dirty="0"/>
-              <a:t>接続する物理リンクの残余帯域合計を評価</a:t>
-            </a:r>
+              <a:t>候補にする</a:t>
+            </a:r>
+            <a:endParaRPr kumimoji="1" lang="en-US" altLang="ja-JP" sz="2400" dirty="0"/>
+          </a:p>
+          <a:p>
+            <a:endParaRPr kumimoji="1" lang="ja-JP" altLang="en-US" sz="2400" dirty="0"/>
           </a:p>
           <a:p>
             <a:r>
               <a:rPr kumimoji="1" lang="ja-JP" altLang="en-US" sz="2400" dirty="0"/>
-              <a:t>残余帯域合計が最大の物理ノードを選ぶ</a:t>
+              <a:t>２．接続する物理リンクの残余帯域合計を</a:t>
+            </a:r>
+            <a:endParaRPr kumimoji="1" lang="en-US" altLang="ja-JP" sz="2400" dirty="0"/>
+          </a:p>
+          <a:p>
+            <a:r>
+              <a:rPr kumimoji="1" lang="ja-JP" altLang="en-US" sz="2400" dirty="0"/>
+              <a:t>評価</a:t>
+            </a:r>
+            <a:endParaRPr kumimoji="1" lang="en-US" altLang="ja-JP" sz="2400" dirty="0"/>
+          </a:p>
+          <a:p>
+            <a:endParaRPr kumimoji="1" lang="ja-JP" altLang="en-US" sz="2400" dirty="0"/>
+          </a:p>
+          <a:p>
+            <a:r>
+              <a:rPr kumimoji="1" lang="ja-JP" altLang="en-US" sz="2400" dirty="0"/>
+              <a:t>３．残余帯域合計が最大の物理ノード</a:t>
+            </a:r>
+            <a:endParaRPr kumimoji="1" lang="en-US" altLang="ja-JP" sz="2400" dirty="0"/>
+          </a:p>
+          <a:p>
+            <a:r>
+              <a:rPr kumimoji="1" lang="ja-JP" altLang="en-US" sz="2400" dirty="0"/>
+              <a:t>を選ぶ</a:t>
             </a:r>
           </a:p>
         </p:txBody>
@@ -5616,8 +6016,8 @@
         </p:nvSpPr>
         <p:spPr>
           <a:xfrm>
-            <a:off x="711199" y="5309707"/>
-            <a:ext cx="8765309" cy="830997"/>
+            <a:off x="614432" y="5555672"/>
+            <a:ext cx="8765309" cy="1200329"/>
           </a:xfrm>
           <a:prstGeom prst="rect">
             <a:avLst/>
@@ -5638,8 +6038,23 @@
           </a:p>
           <a:p>
             <a:r>
+              <a:rPr lang="ja-JP" altLang="en-US" sz="2400" dirty="0">
+                <a:solidFill>
+                  <a:srgbClr val="F17C1D"/>
+                </a:solidFill>
+              </a:rPr>
+              <a:t>相違点</a:t>
+            </a:r>
+            <a:r>
               <a:rPr lang="ja-JP" altLang="en-US" sz="2400" dirty="0"/>
-              <a:t>相違点：仮想ノードの割り当て方</a:t>
+              <a:t>：仮想ノードの割り当て方</a:t>
+            </a:r>
+            <a:endParaRPr lang="en-US" altLang="ja-JP" sz="2400" dirty="0"/>
+          </a:p>
+          <a:p>
+            <a:r>
+              <a:rPr lang="ja-JP" altLang="en-US" sz="2400" dirty="0"/>
+              <a:t>比較対象手法を使用し実験を行っていく</a:t>
             </a:r>
           </a:p>
         </p:txBody>
@@ -6661,8 +7076,8 @@
         </p:nvSpPr>
         <p:spPr>
           <a:xfrm>
-            <a:off x="479136" y="5045070"/>
-            <a:ext cx="11154063" cy="1200329"/>
+            <a:off x="143728" y="4244856"/>
+            <a:ext cx="11154063" cy="3046988"/>
           </a:xfrm>
           <a:prstGeom prst="rect">
             <a:avLst/>
@@ -6695,8 +7110,59 @@
           <a:p>
             <a:r>
               <a:rPr kumimoji="1" lang="ja-JP" altLang="en-US" sz="2400" dirty="0"/>
-              <a:t>リンクマッピングを統一し，ノード選択方法の違いを比較</a:t>
-            </a:r>
+              <a:t>ダイクストラリンクマッピングを実装し，</a:t>
+            </a:r>
+            <a:endParaRPr kumimoji="1" lang="en-US" altLang="ja-JP" sz="2400" dirty="0"/>
+          </a:p>
+          <a:p>
+            <a:r>
+              <a:rPr kumimoji="1" lang="ja-JP" altLang="en-US" sz="2400" dirty="0"/>
+              <a:t>統一したリンクマッピングでノード選択方法の違いを比較</a:t>
+            </a:r>
+            <a:endParaRPr lang="en-US" altLang="ja-JP" sz="2400" dirty="0"/>
+          </a:p>
+          <a:p>
+            <a:r>
+              <a:rPr kumimoji="1" lang="ja-JP" altLang="en-US" sz="2400" dirty="0"/>
+              <a:t>出典：</a:t>
+            </a:r>
+            <a:r>
+              <a:rPr lang="en-US" altLang="ja-JP" sz="2400" dirty="0"/>
+              <a:t>A. Fischer, J.F. Botero, M. </a:t>
+            </a:r>
+            <a:r>
+              <a:rPr lang="en-US" altLang="ja-JP" sz="2400" dirty="0" err="1"/>
+              <a:t>Duelli</a:t>
+            </a:r>
+            <a:r>
+              <a:rPr lang="en-US" altLang="ja-JP" sz="2400" dirty="0"/>
+              <a:t>, D. Schlosser, X. </a:t>
+            </a:r>
+            <a:r>
+              <a:rPr lang="en-US" altLang="ja-JP" sz="2400" dirty="0" err="1"/>
+              <a:t>Hes-selbach</a:t>
+            </a:r>
+            <a:r>
+              <a:rPr lang="en-US" altLang="ja-JP" sz="2400" dirty="0"/>
+              <a:t>, and H. de Meer, “ALEVIN—a framework </a:t>
+            </a:r>
+            <a:r>
+              <a:rPr lang="en-US" altLang="ja-JP" sz="2400" dirty="0" err="1"/>
+              <a:t>todevelop</a:t>
+            </a:r>
+            <a:r>
+              <a:rPr lang="en-US" altLang="ja-JP" sz="2400" dirty="0"/>
+              <a:t>, compare, and analyze virtual network embed-ding algorithms,” Electronic Communications of </a:t>
+            </a:r>
+            <a:r>
+              <a:rPr lang="en-US" altLang="ja-JP" sz="2400" dirty="0" err="1"/>
+              <a:t>theEASST</a:t>
+            </a:r>
+            <a:r>
+              <a:rPr lang="en-US" altLang="ja-JP" sz="2400" dirty="0"/>
+              <a:t>, vol.37, pp.1–12, 2011.</a:t>
+            </a:r>
+            <a:endParaRPr kumimoji="1" lang="ja-JP" altLang="en-US" sz="2400" dirty="0"/>
           </a:p>
           <a:p>
             <a:endParaRPr kumimoji="1" lang="ja-JP" altLang="en-US" sz="2400" dirty="0"/>
@@ -7241,23 +7707,35 @@
         </p:spPr>
         <p:txBody>
           <a:bodyPr>
-            <a:normAutofit/>
+            <a:normAutofit lnSpcReduction="10000"/>
           </a:bodyPr>
           <a:lstStyle/>
           <a:p>
             <a:pPr lvl="0"/>
             <a:r>
-              <a:rPr lang="ja-JP" altLang="ja-JP" dirty="0"/>
-              <a:t>物理ノード数：40、60、80 </a:t>
-            </a:r>
-          </a:p>
-          <a:p>
-            <a:pPr lvl="0"/>
-            <a:r>
-              <a:rPr lang="ja-JP" altLang="ja-JP" dirty="0"/>
-              <a:t>VN要求：10個</a:t>
-            </a:r>
-            <a:endParaRPr lang="en-US" altLang="ja-JP" dirty="0"/>
+              <a:rPr lang="ja-JP" altLang="en-US" dirty="0"/>
+              <a:t>物理ノード数：</a:t>
+            </a:r>
+            <a:r>
+              <a:rPr lang="en-US" altLang="ja-JP" dirty="0"/>
+              <a:t>40</a:t>
+            </a:r>
+            <a:r>
+              <a:rPr lang="ja-JP" altLang="en-US" dirty="0"/>
+              <a:t>，</a:t>
+            </a:r>
+            <a:r>
+              <a:rPr lang="en-US" altLang="ja-JP" dirty="0"/>
+              <a:t>60</a:t>
+            </a:r>
+            <a:r>
+              <a:rPr lang="ja-JP" altLang="en-US" dirty="0"/>
+              <a:t>，</a:t>
+            </a:r>
+            <a:r>
+              <a:rPr lang="en-US" altLang="ja-JP" dirty="0"/>
+              <a:t>80</a:t>
+            </a:r>
           </a:p>
           <a:p>
             <a:pPr lvl="0"/>
@@ -7267,47 +7745,145 @@
             </a:r>
             <a:r>
               <a:rPr lang="ja-JP" altLang="en-US" dirty="0"/>
-              <a:t>要求総ノード数：２０</a:t>
-            </a:r>
-            <a:r>
-              <a:rPr lang="ja-JP" altLang="ja-JP" dirty="0"/>
-              <a:t>、</a:t>
+              <a:t>要求数：</a:t>
+            </a:r>
+            <a:r>
+              <a:rPr lang="en-US" altLang="ja-JP" dirty="0"/>
+              <a:t>10</a:t>
+            </a:r>
+          </a:p>
+          <a:p>
+            <a:pPr lvl="0"/>
+            <a:r>
+              <a:rPr lang="en-US" altLang="ja-JP" dirty="0"/>
+              <a:t>VN</a:t>
             </a:r>
             <a:r>
               <a:rPr lang="ja-JP" altLang="en-US" dirty="0"/>
-              <a:t>３０</a:t>
-            </a:r>
-            <a:r>
-              <a:rPr lang="ja-JP" altLang="ja-JP" dirty="0"/>
-              <a:t>、</a:t>
+              <a:t>要求総ノード数：</a:t>
+            </a:r>
+            <a:r>
+              <a:rPr lang="en-US" altLang="ja-JP" dirty="0"/>
+              <a:t>20</a:t>
             </a:r>
             <a:r>
               <a:rPr lang="ja-JP" altLang="en-US" dirty="0"/>
-              <a:t>４０</a:t>
-            </a:r>
-            <a:r>
-              <a:rPr lang="ja-JP" altLang="ja-JP" dirty="0"/>
-              <a:t> </a:t>
+              <a:t>，</a:t>
+            </a:r>
+            <a:r>
+              <a:rPr lang="en-US" altLang="ja-JP" dirty="0"/>
+              <a:t>30</a:t>
+            </a:r>
+            <a:r>
+              <a:rPr lang="ja-JP" altLang="en-US" dirty="0"/>
+              <a:t>，</a:t>
+            </a:r>
+            <a:r>
+              <a:rPr lang="en-US" altLang="ja-JP" dirty="0"/>
+              <a:t>40</a:t>
             </a:r>
           </a:p>
           <a:p>
             <a:pPr lvl="0"/>
             <a:r>
-              <a:rPr lang="ja-JP" altLang="ja-JP" dirty="0"/>
-              <a:t>需要条件：3種類 </a:t>
-            </a:r>
-          </a:p>
-          <a:p>
-            <a:pPr lvl="0"/>
-            <a:r>
-              <a:rPr lang="ja-JP" altLang="ja-JP" dirty="0"/>
-              <a:t>合計9シナリオ </a:t>
-            </a:r>
-          </a:p>
-          <a:p>
-            <a:pPr marL="0" indent="0">
+              <a:rPr lang="ja-JP" altLang="en-US" dirty="0"/>
+              <a:t>需要条件（</a:t>
+            </a:r>
+            <a:r>
+              <a:rPr lang="en-US" altLang="ja-JP" dirty="0"/>
+              <a:t>CPU</a:t>
+            </a:r>
+            <a:r>
+              <a:rPr lang="ja-JP" altLang="en-US" dirty="0"/>
+              <a:t>需要上限／帯域幅需要上限）：</a:t>
+            </a:r>
+          </a:p>
+          <a:p>
+            <a:pPr marL="0" lvl="0" indent="0">
               <a:buNone/>
             </a:pPr>
+            <a:r>
+              <a:rPr lang="en-US" altLang="ja-JP" dirty="0"/>
+              <a:t>25</a:t>
+            </a:r>
+            <a:r>
+              <a:rPr lang="ja-JP" altLang="en-US" dirty="0"/>
+              <a:t>／</a:t>
+            </a:r>
+            <a:r>
+              <a:rPr lang="en-US" altLang="ja-JP" dirty="0"/>
+              <a:t>25</a:t>
+            </a:r>
+            <a:r>
+              <a:rPr lang="ja-JP" altLang="en-US" dirty="0"/>
+              <a:t>，</a:t>
+            </a:r>
+            <a:r>
+              <a:rPr lang="en-US" altLang="ja-JP" dirty="0"/>
+              <a:t>25</a:t>
+            </a:r>
+            <a:r>
+              <a:rPr lang="ja-JP" altLang="en-US" dirty="0"/>
+              <a:t>／</a:t>
+            </a:r>
+            <a:r>
+              <a:rPr lang="en-US" altLang="ja-JP" dirty="0"/>
+              <a:t>10</a:t>
+            </a:r>
+            <a:r>
+              <a:rPr lang="ja-JP" altLang="en-US" dirty="0"/>
+              <a:t>，</a:t>
+            </a:r>
+            <a:r>
+              <a:rPr lang="en-US" altLang="ja-JP" dirty="0"/>
+              <a:t>10</a:t>
+            </a:r>
+            <a:r>
+              <a:rPr lang="ja-JP" altLang="en-US" dirty="0"/>
+              <a:t>／</a:t>
+            </a:r>
+            <a:r>
+              <a:rPr lang="en-US" altLang="ja-JP" dirty="0"/>
+              <a:t>25</a:t>
+            </a:r>
+          </a:p>
+          <a:p>
+            <a:pPr lvl="0"/>
+            <a:r>
+              <a:rPr lang="ja-JP" altLang="en-US" dirty="0"/>
+              <a:t>実験シナリオ：</a:t>
+            </a:r>
+            <a:r>
+              <a:rPr lang="en-US" altLang="ja-JP" dirty="0"/>
+              <a:t>3×3</a:t>
+            </a:r>
+            <a:r>
+              <a:rPr lang="ja-JP" altLang="en-US" dirty="0"/>
+              <a:t>＝</a:t>
+            </a:r>
+            <a:r>
+              <a:rPr lang="en-US" altLang="ja-JP" dirty="0"/>
+              <a:t>9</a:t>
+            </a:r>
+            <a:r>
+              <a:rPr lang="ja-JP" altLang="en-US" dirty="0"/>
+              <a:t>種類</a:t>
+            </a:r>
+          </a:p>
+          <a:p>
+            <a:pPr lvl="0"/>
+            <a:r>
+              <a:rPr lang="ja-JP" altLang="en-US" dirty="0"/>
+              <a:t>各条件：</a:t>
+            </a:r>
+            <a:r>
+              <a:rPr lang="en-US" altLang="ja-JP" dirty="0"/>
+              <a:t>5</a:t>
+            </a:r>
+            <a:r>
+              <a:rPr lang="ja-JP" altLang="en-US" dirty="0"/>
+              <a:t>回実施</a:t>
+            </a:r>
             <a:endParaRPr kumimoji="1" lang="ja-JP" altLang="en-US" dirty="0"/>
           </a:p>
         </p:txBody>
@@ -9449,7 +10025,7 @@
                   <a:srgbClr val="113160"/>
                 </a:solidFill>
               </a:rPr>
-              <a:t>考察・まとめ・今後の課題</a:t>
+              <a:t>考察・まとめ</a:t>
             </a:r>
             <a:endParaRPr kumimoji="1" lang="ja-JP" altLang="en-US" b="1" dirty="0">
               <a:solidFill>
@@ -9473,7 +10049,7 @@
         </p:nvSpPr>
         <p:spPr>
           <a:xfrm>
-            <a:off x="1041280" y="1691882"/>
+            <a:off x="2058670" y="1668802"/>
             <a:ext cx="1756949" cy="707886"/>
           </a:xfrm>
           <a:prstGeom prst="rect">
@@ -9512,8 +10088,8 @@
         </p:nvSpPr>
         <p:spPr>
           <a:xfrm>
-            <a:off x="-71349" y="2556179"/>
-            <a:ext cx="3960000" cy="3139321"/>
+            <a:off x="422032" y="2556179"/>
+            <a:ext cx="5500466" cy="3785652"/>
           </a:xfrm>
           <a:prstGeom prst="rect">
             <a:avLst/>
@@ -9528,175 +10104,69 @@
           <a:p>
             <a:pPr lvl="0"/>
             <a:r>
-              <a:rPr lang="ja-JP" altLang="en-US" dirty="0"/>
+              <a:rPr lang="ja-JP" altLang="en-US" sz="2400" dirty="0"/>
               <a:t>・</a:t>
             </a:r>
             <a:r>
-              <a:rPr lang="ja-JP" altLang="ja-JP" dirty="0"/>
-              <a:t>二ノ宮手法と寺生手法をALEVINへ実装し，同一条件で比較した </a:t>
-            </a:r>
-            <a:endParaRPr lang="en-US" altLang="ja-JP" dirty="0"/>
+              <a:rPr lang="ja-JP" altLang="ja-JP" sz="2400" dirty="0"/>
+              <a:t>二ノ宮手法</a:t>
+            </a:r>
+            <a:r>
+              <a:rPr lang="ja-JP" altLang="en-US" sz="2400" dirty="0"/>
+              <a:t>、</a:t>
+            </a:r>
+            <a:r>
+              <a:rPr lang="ja-JP" altLang="ja-JP" sz="2400" dirty="0"/>
+              <a:t>寺生手法</a:t>
+            </a:r>
+            <a:r>
+              <a:rPr lang="ja-JP" altLang="en-US" sz="2400" dirty="0"/>
+              <a:t>、ダイクストラ法を</a:t>
+            </a:r>
+            <a:r>
+              <a:rPr lang="ja-JP" altLang="ja-JP" sz="2400" dirty="0"/>
+              <a:t>ALEVINへ実装し，同一条件で比較した </a:t>
+            </a:r>
+            <a:endParaRPr lang="en-US" altLang="ja-JP" sz="2400" dirty="0"/>
           </a:p>
           <a:p>
             <a:pPr lvl="0"/>
-            <a:endParaRPr lang="ja-JP" altLang="ja-JP" dirty="0"/>
+            <a:endParaRPr lang="ja-JP" altLang="ja-JP" sz="2400" dirty="0"/>
           </a:p>
           <a:p>
             <a:pPr lvl="0"/>
             <a:r>
-              <a:rPr lang="ja-JP" altLang="en-US" dirty="0"/>
+              <a:rPr lang="ja-JP" altLang="en-US" sz="2400" dirty="0"/>
               <a:t>・</a:t>
             </a:r>
             <a:r>
-              <a:rPr lang="ja-JP" altLang="ja-JP" dirty="0"/>
-              <a:t>寺生手法は，受理率で9条件中6条件を上回り，CostRevenueは全条件で小さかった </a:t>
-            </a:r>
-            <a:endParaRPr lang="en-US" altLang="ja-JP" dirty="0"/>
+              <a:rPr lang="ja-JP" altLang="ja-JP" sz="2400" dirty="0"/>
+              <a:t>寺生手法は，受理率で9条件中6条件を上回り，CostRevenueは全条件で</a:t>
+            </a:r>
+            <a:endParaRPr lang="en-US" altLang="ja-JP" sz="2400" dirty="0"/>
           </a:p>
           <a:p>
             <a:pPr lvl="0"/>
-            <a:endParaRPr lang="ja-JP" altLang="ja-JP" dirty="0"/>
+            <a:r>
+              <a:rPr lang="ja-JP" altLang="ja-JP" sz="2400" dirty="0"/>
+              <a:t>小さかった </a:t>
+            </a:r>
+            <a:endParaRPr lang="en-US" altLang="ja-JP" sz="2400" dirty="0"/>
           </a:p>
           <a:p>
             <a:pPr lvl="0"/>
-            <a:r>
-              <a:rPr lang="ja-JP" altLang="en-US" dirty="0"/>
+            <a:endParaRPr lang="ja-JP" altLang="ja-JP" sz="2400" dirty="0"/>
+          </a:p>
+          <a:p>
+            <a:pPr lvl="0"/>
+            <a:r>
+              <a:rPr lang="ja-JP" altLang="en-US" sz="2400" dirty="0"/>
               <a:t>・</a:t>
             </a:r>
             <a:r>
-              <a:rPr lang="ja-JP" altLang="ja-JP" dirty="0"/>
+              <a:rPr lang="ja-JP" altLang="ja-JP" sz="2400" dirty="0"/>
               <a:t>二ノ宮手法は，全条件で実行時間が短かった</a:t>
             </a:r>
-          </a:p>
-        </p:txBody>
-      </p:sp>
-      <p:sp>
-        <p:nvSpPr>
-          <p:cNvPr id="8" name="テキスト ボックス 7">
-            <a:extLst>
-              <a:ext uri="{FF2B5EF4-FFF2-40B4-BE49-F238E27FC236}">
-                <a16:creationId xmlns:a16="http://schemas.microsoft.com/office/drawing/2014/main" id="{5FB5174A-6F8A-4976-74D2-E5AAB3A4B978}"/>
-              </a:ext>
-            </a:extLst>
-          </p:cNvPr>
-          <p:cNvSpPr txBox="1"/>
-          <p:nvPr/>
-        </p:nvSpPr>
-        <p:spPr>
-          <a:xfrm>
-            <a:off x="8052942" y="1669133"/>
-            <a:ext cx="3112654" cy="707886"/>
-          </a:xfrm>
-          <a:prstGeom prst="rect">
-            <a:avLst/>
-          </a:prstGeom>
-          <a:noFill/>
-        </p:spPr>
-        <p:txBody>
-          <a:bodyPr wrap="square" rtlCol="0">
-            <a:spAutoFit/>
-          </a:bodyPr>
-          <a:lstStyle/>
-          <a:p>
-            <a:r>
-              <a:rPr kumimoji="1" lang="ja-JP" altLang="en-US" sz="4000" dirty="0">
-                <a:solidFill>
-                  <a:srgbClr val="0B3E8D"/>
-                </a:solidFill>
-              </a:rPr>
-              <a:t>今後の課題</a:t>
-            </a:r>
-          </a:p>
-        </p:txBody>
-      </p:sp>
-      <p:sp>
-        <p:nvSpPr>
-          <p:cNvPr id="9" name="テキスト ボックス 8">
-            <a:extLst>
-              <a:ext uri="{FF2B5EF4-FFF2-40B4-BE49-F238E27FC236}">
-                <a16:creationId xmlns:a16="http://schemas.microsoft.com/office/drawing/2014/main" id="{EAD03134-1570-DFB2-B1F1-8E46D508DA49}"/>
-              </a:ext>
-            </a:extLst>
-          </p:cNvPr>
-          <p:cNvSpPr txBox="1"/>
-          <p:nvPr/>
-        </p:nvSpPr>
-        <p:spPr>
-          <a:xfrm>
-            <a:off x="8051999" y="2393805"/>
-            <a:ext cx="4140000" cy="2585323"/>
-          </a:xfrm>
-          <a:prstGeom prst="rect">
-            <a:avLst/>
-          </a:prstGeom>
-          <a:noFill/>
-        </p:spPr>
-        <p:txBody>
-          <a:bodyPr wrap="square" rtlCol="0">
-            <a:spAutoFit/>
-          </a:bodyPr>
-          <a:lstStyle/>
-          <a:p>
-            <a:pPr lvl="0"/>
-            <a:r>
-              <a:rPr lang="ja-JP" altLang="en-US" dirty="0"/>
-              <a:t>・</a:t>
-            </a:r>
-            <a:r>
-              <a:rPr lang="ja-JP" altLang="ja-JP" dirty="0"/>
-              <a:t>仮想ノード数を固定し，</a:t>
-            </a:r>
-            <a:r>
-              <a:rPr lang="ja-JP" altLang="en-US" dirty="0"/>
-              <a:t>実験を行う</a:t>
-            </a:r>
-            <a:r>
-              <a:rPr lang="ja-JP" altLang="ja-JP" dirty="0"/>
-              <a:t>する </a:t>
-            </a:r>
-            <a:endParaRPr lang="en-US" altLang="ja-JP" dirty="0"/>
-          </a:p>
-          <a:p>
-            <a:pPr lvl="0"/>
-            <a:endParaRPr lang="ja-JP" altLang="ja-JP" dirty="0"/>
-          </a:p>
-          <a:p>
-            <a:pPr lvl="0"/>
-            <a:r>
-              <a:rPr lang="ja-JP" altLang="en-US" dirty="0"/>
-              <a:t>・</a:t>
-            </a:r>
-            <a:r>
-              <a:rPr lang="ja-JP" altLang="ja-JP" dirty="0"/>
-              <a:t>処理別の実行時間と棄却数を計測し，時間差の要因を</a:t>
-            </a:r>
-            <a:r>
-              <a:rPr lang="ja-JP" altLang="en-US" dirty="0"/>
-              <a:t>見つける</a:t>
-            </a:r>
-            <a:r>
-              <a:rPr lang="ja-JP" altLang="ja-JP" dirty="0"/>
-              <a:t> </a:t>
-            </a:r>
-            <a:endParaRPr lang="en-US" altLang="ja-JP" dirty="0"/>
-          </a:p>
-          <a:p>
-            <a:pPr lvl="0"/>
-            <a:endParaRPr lang="ja-JP" altLang="ja-JP" dirty="0"/>
-          </a:p>
-          <a:p>
-            <a:pPr lvl="0"/>
-            <a:r>
-              <a:rPr lang="ja-JP" altLang="en-US" dirty="0"/>
-              <a:t>・</a:t>
-            </a:r>
-            <a:r>
-              <a:rPr lang="ja-JP" altLang="ja-JP" dirty="0"/>
-              <a:t>有向グラフを無向グラフへ変更し，再評価する</a:t>
-            </a:r>
-          </a:p>
-          <a:p>
-            <a:endParaRPr kumimoji="1" lang="ja-JP" altLang="en-US" dirty="0"/>
           </a:p>
         </p:txBody>
       </p:sp>
@@ -9824,7 +10294,7 @@
         </p:nvSpPr>
         <p:spPr>
           <a:xfrm>
-            <a:off x="4842285" y="1722701"/>
+            <a:off x="7740230" y="1664395"/>
             <a:ext cx="1756949" cy="707886"/>
           </a:xfrm>
           <a:prstGeom prst="rect">
@@ -9868,8 +10338,8 @@
         </p:nvSpPr>
         <p:spPr>
           <a:xfrm>
-            <a:off x="3813748" y="2529000"/>
-            <a:ext cx="4140000" cy="2031325"/>
+            <a:off x="6095999" y="2556179"/>
+            <a:ext cx="5673969" cy="2954655"/>
           </a:xfrm>
           <a:prstGeom prst="rect">
             <a:avLst/>
@@ -9884,142 +10354,32 @@
           <a:p>
             <a:pPr lvl="0"/>
             <a:r>
-              <a:rPr lang="ja-JP" altLang="en-US" dirty="0"/>
+              <a:rPr lang="ja-JP" altLang="en-US" sz="2800" dirty="0"/>
               <a:t>・</a:t>
             </a:r>
             <a:r>
-              <a:rPr lang="ja-JP" altLang="ja-JP" dirty="0"/>
+              <a:rPr lang="ja-JP" altLang="ja-JP" sz="2800" dirty="0"/>
               <a:t>寺生手法は帯域を考慮するため，リンクマッピングに必要な帯域を確保しやすいと考えられる </a:t>
             </a:r>
-            <a:endParaRPr lang="en-US" altLang="ja-JP" dirty="0"/>
+            <a:endParaRPr lang="en-US" altLang="ja-JP" sz="2800" dirty="0"/>
           </a:p>
           <a:p>
             <a:pPr lvl="0"/>
-            <a:endParaRPr lang="ja-JP" altLang="ja-JP" dirty="0"/>
+            <a:endParaRPr lang="ja-JP" altLang="ja-JP" sz="2800" dirty="0"/>
           </a:p>
           <a:p>
             <a:pPr lvl="0"/>
             <a:r>
-              <a:rPr lang="ja-JP" altLang="en-US" dirty="0"/>
+              <a:rPr lang="ja-JP" altLang="en-US" sz="2800" dirty="0"/>
               <a:t>・</a:t>
             </a:r>
             <a:r>
-              <a:rPr lang="ja-JP" altLang="ja-JP" dirty="0"/>
+              <a:rPr lang="ja-JP" altLang="ja-JP" sz="2800" dirty="0"/>
               <a:t>二ノ宮手法は早期棄却により，後続処理を省略した可能性がある</a:t>
             </a:r>
           </a:p>
           <a:p>
             <a:endParaRPr kumimoji="1" lang="ja-JP" altLang="en-US" dirty="0"/>
-          </a:p>
-        </p:txBody>
-      </p:sp>
-      <p:sp>
-        <p:nvSpPr>
-          <p:cNvPr id="16" name="正方形/長方形 15">
-            <a:extLst>
-              <a:ext uri="{FF2B5EF4-FFF2-40B4-BE49-F238E27FC236}">
-                <a16:creationId xmlns:a16="http://schemas.microsoft.com/office/drawing/2014/main" id="{0CB23A72-F00E-75E8-D077-CB102AB67713}"/>
-              </a:ext>
-            </a:extLst>
-          </p:cNvPr>
-          <p:cNvSpPr/>
-          <p:nvPr/>
-        </p:nvSpPr>
-        <p:spPr>
-          <a:xfrm>
-            <a:off x="3797495" y="1663693"/>
-            <a:ext cx="60388" cy="4924292"/>
-          </a:xfrm>
-          <a:prstGeom prst="rect">
-            <a:avLst/>
-          </a:prstGeom>
-          <a:ln>
-            <a:solidFill>
-              <a:schemeClr val="bg1"/>
-            </a:solidFill>
-          </a:ln>
-        </p:spPr>
-        <p:style>
-          <a:lnRef idx="2">
-            <a:schemeClr val="accent1">
-              <a:shade val="15000"/>
-            </a:schemeClr>
-          </a:lnRef>
-          <a:fillRef idx="1">
-            <a:schemeClr val="accent1"/>
-          </a:fillRef>
-          <a:effectRef idx="0">
-            <a:schemeClr val="accent1"/>
-          </a:effectRef>
-          <a:fontRef idx="minor">
-            <a:schemeClr val="lt1"/>
-          </a:fontRef>
-        </p:style>
-        <p:txBody>
-          <a:bodyPr rtlCol="0" anchor="ctr"/>
-          <a:lstStyle/>
-          <a:p>
-            <a:pPr algn="ctr"/>
-            <a:endParaRPr kumimoji="1" lang="ja-JP" altLang="en-US">
-              <a:solidFill>
-                <a:srgbClr val="113160"/>
-              </a:solidFill>
-            </a:endParaRPr>
-          </a:p>
-        </p:txBody>
-      </p:sp>
-      <p:sp>
-        <p:nvSpPr>
-          <p:cNvPr id="18" name="正方形/長方形 17">
-            <a:extLst>
-              <a:ext uri="{FF2B5EF4-FFF2-40B4-BE49-F238E27FC236}">
-                <a16:creationId xmlns:a16="http://schemas.microsoft.com/office/drawing/2014/main" id="{77304414-40CD-DA18-DB3A-0B8A2E93C7AF}"/>
-              </a:ext>
-            </a:extLst>
-          </p:cNvPr>
-          <p:cNvSpPr/>
-          <p:nvPr/>
-        </p:nvSpPr>
-        <p:spPr>
-          <a:xfrm>
-            <a:off x="7923554" y="1663694"/>
-            <a:ext cx="60388" cy="4924292"/>
-          </a:xfrm>
-          <a:prstGeom prst="rect">
-            <a:avLst/>
-          </a:prstGeom>
-          <a:ln>
-            <a:solidFill>
-              <a:schemeClr val="bg1"/>
-            </a:solidFill>
-          </a:ln>
-        </p:spPr>
-        <p:style>
-          <a:lnRef idx="2">
-            <a:schemeClr val="accent1">
-              <a:shade val="15000"/>
-            </a:schemeClr>
-          </a:lnRef>
-          <a:fillRef idx="1">
-            <a:schemeClr val="accent1"/>
-          </a:fillRef>
-          <a:effectRef idx="0">
-            <a:schemeClr val="accent1"/>
-          </a:effectRef>
-          <a:fontRef idx="minor">
-            <a:schemeClr val="lt1"/>
-          </a:fontRef>
-        </p:style>
-        <p:txBody>
-          <a:bodyPr rtlCol="0" anchor="ctr"/>
-          <a:lstStyle/>
-          <a:p>
-            <a:pPr algn="ctr"/>
-            <a:endParaRPr kumimoji="1" lang="ja-JP" altLang="en-US">
-              <a:solidFill>
-                <a:srgbClr val="113160"/>
-              </a:solidFill>
-            </a:endParaRPr>
           </a:p>
         </p:txBody>
       </p:sp>
